--- a/chapter5/parts/part-11-case-studies-and-activities/clip.pptx
+++ b/chapter5/parts/part-11-case-studies-and-activities/clip.pptx
@@ -4172,7 +4172,7 @@
               </a:defRPr>
             </a:pPr>
             <a:r>
-              <a:t>Chapter 5 — 11 Case Studies And Activities</a:t>
+              <a:t>Chapter 5 — Case Studies And Activities</a:t>
             </a:r>
           </a:p>
         </p:txBody>
@@ -4331,7 +4331,7 @@
               </a:defRPr>
             </a:pPr>
             <a:r>
-              <a:t>Chapter 5 — 11 Case Studies And Activities</a:t>
+              <a:t>Chapter 5 — Case Studies And Activities</a:t>
             </a:r>
           </a:p>
         </p:txBody>
@@ -4490,7 +4490,7 @@
               </a:defRPr>
             </a:pPr>
             <a:r>
-              <a:t>Chapter 5 — 11 Case Studies And Activities</a:t>
+              <a:t>Chapter 5 — Case Studies And Activities</a:t>
             </a:r>
           </a:p>
         </p:txBody>
@@ -4689,7 +4689,7 @@
               </a:defRPr>
             </a:pPr>
             <a:r>
-              <a:t>Chapter 5 — 11 Case Studies And Activities</a:t>
+              <a:t>Chapter 5 — Case Studies And Activities</a:t>
             </a:r>
           </a:p>
         </p:txBody>
@@ -4888,7 +4888,7 @@
               </a:defRPr>
             </a:pPr>
             <a:r>
-              <a:t>Chapter 5 — 11 Case Studies And Activities</a:t>
+              <a:t>Chapter 5 — Case Studies And Activities</a:t>
             </a:r>
           </a:p>
         </p:txBody>
@@ -5087,7 +5087,7 @@
               </a:defRPr>
             </a:pPr>
             <a:r>
-              <a:t>Chapter 5 — 11 Case Studies And Activities</a:t>
+              <a:t>Chapter 5 — Case Studies And Activities</a:t>
             </a:r>
           </a:p>
         </p:txBody>
@@ -5286,7 +5286,7 @@
               </a:defRPr>
             </a:pPr>
             <a:r>
-              <a:t>Chapter 5 — 11 Case Studies And Activities</a:t>
+              <a:t>Chapter 5 — Case Studies And Activities</a:t>
             </a:r>
           </a:p>
         </p:txBody>
@@ -5711,7 +5711,7 @@
               </a:defRPr>
             </a:pPr>
             <a:r>
-              <a:t>Chapter 5 — 11 Case Studies And Activities</a:t>
+              <a:t>Chapter 5 — Case Studies And Activities</a:t>
             </a:r>
           </a:p>
         </p:txBody>
@@ -5890,7 +5890,7 @@
               </a:defRPr>
             </a:pPr>
             <a:r>
-              <a:t>Chapter 5 — 11 Case Studies And Activities</a:t>
+              <a:t>Chapter 5 — Case Studies And Activities</a:t>
             </a:r>
           </a:p>
         </p:txBody>
@@ -6069,7 +6069,7 @@
               </a:defRPr>
             </a:pPr>
             <a:r>
-              <a:t>Chapter 5 — 11 Case Studies And Activities</a:t>
+              <a:t>Chapter 5 — Case Studies And Activities</a:t>
             </a:r>
           </a:p>
         </p:txBody>

--- a/chapter5/parts/part-11-case-studies-and-activities/clip.pptx
+++ b/chapter5/parts/part-11-case-studies-and-activities/clip.pptx
@@ -4256,10 +4256,12 @@
           </a:bodyPr>
           <a:lstStyle/>
           <a:p>
-            <a:pPr>
+            <a:pPr lvl="0" marL="457200" indent="-228600">
+              <a:buFont typeface="Calibri"/>
               <a:spcAft>
                 <a:spcPts val="1000"/>
               </a:spcAft>
+              <a:buSzPct val="100000"/>
               <a:buChar char="•"/>
               <a:lnSpc>
                 <a:spcPts val="2200"/>
@@ -4276,10 +4278,12 @@
             </a:r>
           </a:p>
           <a:p>
-            <a:pPr>
+            <a:pPr lvl="0" marL="457200" indent="-228600">
+              <a:buFont typeface="Calibri"/>
               <a:spcAft>
                 <a:spcPts val="1000"/>
               </a:spcAft>
+              <a:buSzPct val="100000"/>
               <a:buChar char="•"/>
               <a:lnSpc>
                 <a:spcPts val="2200"/>
@@ -4415,10 +4419,12 @@
           </a:bodyPr>
           <a:lstStyle/>
           <a:p>
-            <a:pPr>
+            <a:pPr lvl="0" marL="457200" indent="-228600">
+              <a:buFont typeface="Calibri"/>
               <a:spcAft>
                 <a:spcPts val="1000"/>
               </a:spcAft>
+              <a:buSzPct val="100000"/>
               <a:buChar char="•"/>
               <a:lnSpc>
                 <a:spcPts val="2200"/>
@@ -4435,10 +4441,12 @@
             </a:r>
           </a:p>
           <a:p>
-            <a:pPr>
+            <a:pPr lvl="0" marL="457200" indent="-228600">
+              <a:buFont typeface="Calibri"/>
               <a:spcAft>
                 <a:spcPts val="1000"/>
               </a:spcAft>
+              <a:buSzPct val="100000"/>
               <a:buChar char="•"/>
               <a:lnSpc>
                 <a:spcPts val="2200"/>
@@ -4574,10 +4582,12 @@
           </a:bodyPr>
           <a:lstStyle/>
           <a:p>
-            <a:pPr>
+            <a:pPr lvl="0" marL="457200" indent="-228600">
+              <a:buFont typeface="Calibri"/>
               <a:spcAft>
                 <a:spcPts val="1000"/>
               </a:spcAft>
+              <a:buSzPct val="100000"/>
               <a:buChar char="•"/>
               <a:lnSpc>
                 <a:spcPts val="2200"/>
@@ -4594,10 +4604,12 @@
             </a:r>
           </a:p>
           <a:p>
-            <a:pPr>
+            <a:pPr lvl="0" marL="457200" indent="-228600">
+              <a:buFont typeface="Calibri"/>
               <a:spcAft>
                 <a:spcPts val="1000"/>
               </a:spcAft>
+              <a:buSzPct val="100000"/>
               <a:buChar char="•"/>
               <a:lnSpc>
                 <a:spcPts val="2200"/>
@@ -4614,10 +4626,12 @@
             </a:r>
           </a:p>
           <a:p>
-            <a:pPr>
+            <a:pPr lvl="0" marL="457200" indent="-228600">
+              <a:buFont typeface="Calibri"/>
               <a:spcAft>
                 <a:spcPts val="1000"/>
               </a:spcAft>
+              <a:buSzPct val="100000"/>
               <a:buChar char="•"/>
               <a:lnSpc>
                 <a:spcPts val="2200"/>
@@ -4634,10 +4648,12 @@
             </a:r>
           </a:p>
           <a:p>
-            <a:pPr>
+            <a:pPr lvl="0" marL="457200" indent="-228600">
+              <a:buFont typeface="Calibri"/>
               <a:spcAft>
                 <a:spcPts val="1000"/>
               </a:spcAft>
+              <a:buSzPct val="100000"/>
               <a:buChar char="•"/>
               <a:lnSpc>
                 <a:spcPts val="2200"/>
@@ -4773,10 +4789,12 @@
           </a:bodyPr>
           <a:lstStyle/>
           <a:p>
-            <a:pPr>
+            <a:pPr lvl="0" marL="457200" indent="-228600">
+              <a:buFont typeface="Calibri"/>
               <a:spcAft>
                 <a:spcPts val="1000"/>
               </a:spcAft>
+              <a:buSzPct val="100000"/>
               <a:buChar char="•"/>
               <a:lnSpc>
                 <a:spcPts val="2200"/>
@@ -4793,10 +4811,12 @@
             </a:r>
           </a:p>
           <a:p>
-            <a:pPr>
+            <a:pPr lvl="0" marL="457200" indent="-228600">
+              <a:buFont typeface="Calibri"/>
               <a:spcAft>
                 <a:spcPts val="1000"/>
               </a:spcAft>
+              <a:buSzPct val="100000"/>
               <a:buChar char="•"/>
               <a:lnSpc>
                 <a:spcPts val="2200"/>
@@ -4813,10 +4833,12 @@
             </a:r>
           </a:p>
           <a:p>
-            <a:pPr>
+            <a:pPr lvl="0" marL="457200" indent="-228600">
+              <a:buFont typeface="Calibri"/>
               <a:spcAft>
                 <a:spcPts val="1000"/>
               </a:spcAft>
+              <a:buSzPct val="100000"/>
               <a:buChar char="•"/>
               <a:lnSpc>
                 <a:spcPts val="2200"/>
@@ -4833,10 +4855,12 @@
             </a:r>
           </a:p>
           <a:p>
-            <a:pPr>
+            <a:pPr lvl="0" marL="457200" indent="-228600">
+              <a:buFont typeface="Calibri"/>
               <a:spcAft>
                 <a:spcPts val="1000"/>
               </a:spcAft>
+              <a:buSzPct val="100000"/>
               <a:buChar char="•"/>
               <a:lnSpc>
                 <a:spcPts val="2200"/>
@@ -4972,10 +4996,12 @@
           </a:bodyPr>
           <a:lstStyle/>
           <a:p>
-            <a:pPr>
+            <a:pPr lvl="0" marL="457200" indent="-228600">
+              <a:buFont typeface="Calibri"/>
               <a:spcAft>
                 <a:spcPts val="1000"/>
               </a:spcAft>
+              <a:buSzPct val="100000"/>
               <a:buChar char="•"/>
               <a:lnSpc>
                 <a:spcPts val="2200"/>
@@ -4992,10 +5018,12 @@
             </a:r>
           </a:p>
           <a:p>
-            <a:pPr>
+            <a:pPr lvl="0" marL="457200" indent="-228600">
+              <a:buFont typeface="Calibri"/>
               <a:spcAft>
                 <a:spcPts val="1000"/>
               </a:spcAft>
+              <a:buSzPct val="100000"/>
               <a:buChar char="•"/>
               <a:lnSpc>
                 <a:spcPts val="2200"/>
@@ -5012,10 +5040,12 @@
             </a:r>
           </a:p>
           <a:p>
-            <a:pPr>
+            <a:pPr lvl="0" marL="457200" indent="-228600">
+              <a:buFont typeface="Calibri"/>
               <a:spcAft>
                 <a:spcPts val="1000"/>
               </a:spcAft>
+              <a:buSzPct val="100000"/>
               <a:buChar char="•"/>
               <a:lnSpc>
                 <a:spcPts val="2200"/>
@@ -5032,10 +5062,12 @@
             </a:r>
           </a:p>
           <a:p>
-            <a:pPr>
+            <a:pPr lvl="0" marL="457200" indent="-228600">
+              <a:buFont typeface="Calibri"/>
               <a:spcAft>
                 <a:spcPts val="1000"/>
               </a:spcAft>
+              <a:buSzPct val="100000"/>
               <a:buChar char="•"/>
               <a:lnSpc>
                 <a:spcPts val="2200"/>
@@ -5171,10 +5203,12 @@
           </a:bodyPr>
           <a:lstStyle/>
           <a:p>
-            <a:pPr>
+            <a:pPr lvl="0" marL="457200" indent="-228600">
+              <a:buFont typeface="Calibri"/>
               <a:spcAft>
                 <a:spcPts val="1000"/>
               </a:spcAft>
+              <a:buSzPct val="100000"/>
               <a:buChar char="•"/>
               <a:lnSpc>
                 <a:spcPts val="2200"/>
@@ -5191,10 +5225,12 @@
             </a:r>
           </a:p>
           <a:p>
-            <a:pPr>
+            <a:pPr lvl="0" marL="457200" indent="-228600">
+              <a:buFont typeface="Calibri"/>
               <a:spcAft>
                 <a:spcPts val="1000"/>
               </a:spcAft>
+              <a:buSzPct val="100000"/>
               <a:buChar char="•"/>
               <a:lnSpc>
                 <a:spcPts val="2200"/>
@@ -5211,10 +5247,12 @@
             </a:r>
           </a:p>
           <a:p>
-            <a:pPr>
+            <a:pPr lvl="0" marL="457200" indent="-228600">
+              <a:buFont typeface="Calibri"/>
               <a:spcAft>
                 <a:spcPts val="1000"/>
               </a:spcAft>
+              <a:buSzPct val="100000"/>
               <a:buChar char="•"/>
               <a:lnSpc>
                 <a:spcPts val="2200"/>
@@ -5231,10 +5269,12 @@
             </a:r>
           </a:p>
           <a:p>
-            <a:pPr>
+            <a:pPr lvl="0" marL="457200" indent="-228600">
+              <a:buFont typeface="Calibri"/>
               <a:spcAft>
                 <a:spcPts val="1000"/>
               </a:spcAft>
+              <a:buSzPct val="100000"/>
               <a:buChar char="•"/>
               <a:lnSpc>
                 <a:spcPts val="2200"/>
@@ -5795,10 +5835,12 @@
           </a:bodyPr>
           <a:lstStyle/>
           <a:p>
-            <a:pPr>
+            <a:pPr lvl="0" marL="457200" indent="-228600">
+              <a:buFont typeface="Calibri"/>
               <a:spcAft>
                 <a:spcPts val="1000"/>
               </a:spcAft>
+              <a:buSzPct val="100000"/>
               <a:buChar char="•"/>
               <a:lnSpc>
                 <a:spcPts val="2200"/>
@@ -5815,10 +5857,12 @@
             </a:r>
           </a:p>
           <a:p>
-            <a:pPr>
+            <a:pPr lvl="0" marL="457200" indent="-228600">
+              <a:buFont typeface="Calibri"/>
               <a:spcAft>
                 <a:spcPts val="1000"/>
               </a:spcAft>
+              <a:buSzPct val="100000"/>
               <a:buChar char="•"/>
               <a:lnSpc>
                 <a:spcPts val="2200"/>
@@ -5835,10 +5879,12 @@
             </a:r>
           </a:p>
           <a:p>
-            <a:pPr>
+            <a:pPr lvl="0" marL="457200" indent="-228600">
+              <a:buFont typeface="Calibri"/>
               <a:spcAft>
                 <a:spcPts val="1000"/>
               </a:spcAft>
+              <a:buSzPct val="100000"/>
               <a:buChar char="•"/>
               <a:lnSpc>
                 <a:spcPts val="2200"/>
@@ -5974,10 +6020,12 @@
           </a:bodyPr>
           <a:lstStyle/>
           <a:p>
-            <a:pPr>
+            <a:pPr lvl="0" marL="457200" indent="-228600">
+              <a:buFont typeface="Calibri"/>
               <a:spcAft>
                 <a:spcPts val="1000"/>
               </a:spcAft>
+              <a:buSzPct val="100000"/>
               <a:buChar char="•"/>
               <a:lnSpc>
                 <a:spcPts val="2200"/>
@@ -5994,10 +6042,12 @@
             </a:r>
           </a:p>
           <a:p>
-            <a:pPr>
+            <a:pPr lvl="0" marL="457200" indent="-228600">
+              <a:buFont typeface="Calibri"/>
               <a:spcAft>
                 <a:spcPts val="1000"/>
               </a:spcAft>
+              <a:buSzPct val="100000"/>
               <a:buChar char="•"/>
               <a:lnSpc>
                 <a:spcPts val="2200"/>
@@ -6014,10 +6064,12 @@
             </a:r>
           </a:p>
           <a:p>
-            <a:pPr>
+            <a:pPr lvl="0" marL="457200" indent="-228600">
+              <a:buFont typeface="Calibri"/>
               <a:spcAft>
                 <a:spcPts val="1000"/>
               </a:spcAft>
+              <a:buSzPct val="100000"/>
               <a:buChar char="•"/>
               <a:lnSpc>
                 <a:spcPts val="2200"/>
